--- a/docs/01_Architecture_and_Design_Summary.pptx
+++ b/docs/01_Architecture_and_Design_Summary.pptx
@@ -3490,11 +3490,11 @@
             <a:r>
               <a:rPr sz="1700" b="0">
                 <a:solidFill>
-                  <a:srgbClr val="1C2B3A"/>
+                  <a:srgbClr val="0B2545"/>
                 </a:solidFill>
                 <a:latin typeface="Segoe UI"/>
               </a:rPr>
-              <a:t>•  Populate and enable MSP 5th Edition as a second framework.</a:t>
+              <a:t>•  Done — MSP 5th Edition and SAFe 6.0 Essential are live behind the front door.</a:t>
             </a:r>
           </a:p>
           <a:p>
@@ -3513,7 +3513,7 @@
                 </a:solidFill>
                 <a:latin typeface="Segoe UI"/>
               </a:rPr>
-              <a:t>•  Persistent storage (disk / Postgres) so authoring edits survive redeploys.</a:t>
+              <a:t>•  SME-verify the MSP / SAFe indicative activity breakdowns and marks.</a:t>
             </a:r>
           </a:p>
           <a:p>
@@ -3532,7 +3532,26 @@
                 </a:solidFill>
                 <a:latin typeface="Segoe UI"/>
               </a:rPr>
-              <a:t>•  Saved per-engagement tailored views.</a:t>
+              <a:t>•  Extend SAFe beyond Essential (Portfolio / Large Solution).</a:t>
+            </a:r>
+          </a:p>
+          <a:p>
+            <a:pPr algn="l">
+              <a:spcBef>
+                <a:spcPts val="0"/>
+              </a:spcBef>
+              <a:spcAft>
+                <a:spcPts val="1200"/>
+              </a:spcAft>
+            </a:pPr>
+            <a:r>
+              <a:rPr sz="1700" b="0">
+                <a:solidFill>
+                  <a:srgbClr val="1C2B3A"/>
+                </a:solidFill>
+                <a:latin typeface="Segoe UI"/>
+              </a:rPr>
+              <a:t>•  Persistent storage (disk / Postgres) so authoring edits survive redeploys.</a:t>
             </a:r>
           </a:p>
         </p:txBody>
@@ -3762,7 +3781,7 @@
                 </a:solidFill>
                 <a:latin typeface="Segoe UI"/>
               </a:rPr>
-              <a:t>An explorable picture of a project-management method.</a:t>
+              <a:t>An explorable picture of a project-, programme- or agile-delivery method.</a:t>
             </a:r>
           </a:p>
         </p:txBody>
@@ -3804,7 +3823,7 @@
                 </a:solidFill>
                 <a:latin typeface="Segoe UI"/>
               </a:rPr>
-              <a:t>•  PRINCE2 7 rendered as an interactive network graph.</a:t>
+              <a:t>•  Three methods as interactive network graphs: PRINCE2 7, MSP 5th ed, SAFe 6.0 Essential.</a:t>
             </a:r>
           </a:p>
           <a:p>
@@ -3823,7 +3842,7 @@
                 </a:solidFill>
                 <a:latin typeface="Segoe UI"/>
               </a:rPr>
-              <a:t>•  7 processes, 41 activities, cross-referenced to roles, practices, approaches and products.</a:t>
+              <a:t>•  Each cross-references its activities to the roles, artefacts, practices and principles around them.</a:t>
             </a:r>
           </a:p>
           <a:p>
@@ -3842,7 +3861,7 @@
                 </a:solidFill>
                 <a:latin typeface="Segoe UI"/>
               </a:rPr>
-              <a:t>•  Single-origin web app; framework-agnostic data model (MSP-ready).</a:t>
+              <a:t>•  Single-origin web app; config-driven, framework-agnostic model — a new method is just data.</a:t>
             </a:r>
           </a:p>
         </p:txBody>
@@ -4816,7 +4835,7 @@
                 </a:solidFill>
                 <a:latin typeface="Segoe UI"/>
               </a:rPr>
-              <a:t>Framework → entities → relationships; adding MSP means adding a data file.</a:t>
+              <a:t>Framework → entities → relationships; each framework's config (types/codes/lanes/phases) makes the app generic — adding MSP or SAFe is a data file.</a:t>
             </a:r>
           </a:p>
         </p:txBody>
@@ -5672,7 +5691,7 @@
                 </a:solidFill>
                 <a:latin typeface="Segoe UI"/>
               </a:rPr>
-              <a:t>•  Render Blueprint (render.yaml); push to main auto-deploys.</a:t>
+              <a:t>•  Render Blueprint: one service per framework (FRAMEWORK_KEY + APP_BASE); push to main auto-deploys all.</a:t>
             </a:r>
           </a:p>
           <a:p>
@@ -5691,7 +5710,26 @@
                 </a:solidFill>
                 <a:latin typeface="Segoe UI"/>
               </a:rPr>
-              <a:t>•  DB auto-seeds on boot — ephemeral disk, so edits reset on redeploy.</a:t>
+              <a:t>•  Shared front door apps.p3mai.com (apps-gateway) routes /prince2, /msp, /safe.</a:t>
+            </a:r>
+          </a:p>
+          <a:p>
+            <a:pPr algn="l">
+              <a:spcBef>
+                <a:spcPts val="0"/>
+              </a:spcBef>
+              <a:spcAft>
+                <a:spcPts val="1200"/>
+              </a:spcAft>
+            </a:pPr>
+            <a:r>
+              <a:rPr sz="1700" b="0">
+                <a:solidFill>
+                  <a:srgbClr val="1C2B3A"/>
+                </a:solidFill>
+                <a:latin typeface="Segoe UI"/>
+              </a:rPr>
+              <a:t>•  DB auto-seeds its framework on boot — ephemeral disk, so edits reset on redeploy.</a:t>
             </a:r>
           </a:p>
         </p:txBody>
@@ -5965,7 +6003,7 @@
                           </a:solidFill>
                           <a:latin typeface="Segoe UI"/>
                         </a:rPr>
-                        <a:t>Framework-agnostic model</a:t>
+                        <a:t>Config-driven, framework-agnostic model</a:t>
                       </a:r>
                     </a:p>
                   </a:txBody>
@@ -5987,7 +6025,7 @@
                           </a:solidFill>
                           <a:latin typeface="Segoe UI"/>
                         </a:rPr>
-                        <a:t>MSP drops in as data, no code change</a:t>
+                        <a:t>PRINCE2, MSP &amp; SAFe on one codebase; new method = data</a:t>
                       </a:r>
                     </a:p>
                   </a:txBody>
@@ -6011,7 +6049,7 @@
                           </a:solidFill>
                           <a:latin typeface="Segoe UI"/>
                         </a:rPr>
-                        <a:t>Activity-centric relationships</a:t>
+                        <a:t>One image, one service per framework</a:t>
                       </a:r>
                     </a:p>
                   </a:txBody>
@@ -6033,7 +6071,7 @@
                           </a:solidFill>
                           <a:latin typeface="Segoe UI"/>
                         </a:rPr>
-                        <a:t>One row per real mark; higher links derived</a:t>
+                        <a:t>FRAMEWORK_KEY selects each; shared front door</a:t>
                       </a:r>
                     </a:p>
                   </a:txBody>
@@ -6057,7 +6095,7 @@
                           </a:solidFill>
                           <a:latin typeface="Segoe UI"/>
                         </a:rPr>
-                        <a:t>Self-contained JSON seed</a:t>
+                        <a:t>Activity-centric relationships</a:t>
                       </a:r>
                     </a:p>
                   </a:txBody>
@@ -6079,7 +6117,7 @@
                           </a:solidFill>
                           <a:latin typeface="Segoe UI"/>
                         </a:rPr>
-                        <a:t>Deploy independent of the spreadsheet</a:t>
+                        <a:t>One row per real mark; higher links derived</a:t>
                       </a:r>
                     </a:p>
                   </a:txBody>

--- a/docs/01_Architecture_and_Design_Summary.pptx
+++ b/docs/01_Architecture_and_Design_Summary.pptx
@@ -3494,7 +3494,7 @@
                 </a:solidFill>
                 <a:latin typeface="Segoe UI"/>
               </a:rPr>
-              <a:t>•  Done — MSP 5th Edition and SAFe 6.0 Essential are live behind the front door.</a:t>
+              <a:t>•  Done — MSP, SAFe 6.0 Essential and PMBOK 6th ed are live behind the front door.</a:t>
             </a:r>
           </a:p>
           <a:p>
@@ -3513,7 +3513,7 @@
                 </a:solidFill>
                 <a:latin typeface="Segoe UI"/>
               </a:rPr>
-              <a:t>•  SME-verify the MSP / SAFe indicative activity breakdowns and marks.</a:t>
+              <a:t>•  SME-verify the indicative activity breakdowns / PMBOK ITTO cross-references.</a:t>
             </a:r>
           </a:p>
           <a:p>
@@ -3532,7 +3532,7 @@
                 </a:solidFill>
                 <a:latin typeface="Segoe UI"/>
               </a:rPr>
-              <a:t>•  Extend SAFe beyond Essential (Portfolio / Large Solution).</a:t>
+              <a:t>•  Extend SAFe beyond Essential; consider PMBOK 7/8 (principles + performance domains).</a:t>
             </a:r>
           </a:p>
           <a:p>
@@ -3823,7 +3823,7 @@
                 </a:solidFill>
                 <a:latin typeface="Segoe UI"/>
               </a:rPr>
-              <a:t>•  Three methods as interactive network graphs: PRINCE2 7, MSP 5th ed, SAFe 6.0 Essential.</a:t>
+              <a:t>•  Four methods as interactive network graphs: PRINCE2 7, MSP 5th ed, SAFe 6.0 Essential, PMBOK 6th ed.</a:t>
             </a:r>
           </a:p>
           <a:p>
@@ -3842,7 +3842,7 @@
                 </a:solidFill>
                 <a:latin typeface="Segoe UI"/>
               </a:rPr>
-              <a:t>•  Each cross-references its activities to the roles, artefacts, practices and principles around them.</a:t>
+              <a:t>•  Each cross-references its activities/processes to the roles, artefacts, tools and principles around them.</a:t>
             </a:r>
           </a:p>
           <a:p>
@@ -3861,7 +3861,7 @@
                 </a:solidFill>
                 <a:latin typeface="Segoe UI"/>
               </a:rPr>
-              <a:t>•  Single-origin web app; config-driven, framework-agnostic model — a new method is just data.</a:t>
+              <a:t>•  Single-origin web app; config-driven, framework-agnostic model — a new method is (almost) just data.</a:t>
             </a:r>
           </a:p>
         </p:txBody>
